--- a/slides/intro_CV/slides.pptx
+++ b/slides/intro_CV/slides.pptx
@@ -722,7 +722,7 @@
             <a:r>
               <a:rPr b="0" lang="en-US" sz="1800" spc="-1" strike="noStrike">
                 <a:solidFill>
-                  <a:srgbClr val="1a1a2e"/>
+                  <a:srgbClr val="1b3a6b"/>
                 </a:solidFill>
                 <a:latin typeface="Arial"/>
                 <a:ea typeface="Arial"/>
@@ -1164,7 +1164,7 @@
             <a:r>
               <a:rPr b="0" lang="en-US" sz="1800" spc="-1" strike="noStrike">
                 <a:solidFill>
-                  <a:srgbClr val="1a1a2e"/>
+                  <a:srgbClr val="1b3a6b"/>
                 </a:solidFill>
                 <a:latin typeface="Arial"/>
                 <a:ea typeface="Arial"/>
@@ -1497,7 +1497,7 @@
             <a:r>
               <a:rPr b="0" lang="en-US" sz="1800" spc="-1" strike="noStrike">
                 <a:solidFill>
-                  <a:srgbClr val="1a1a2e"/>
+                  <a:srgbClr val="1b3a6b"/>
                 </a:solidFill>
                 <a:latin typeface="Arial"/>
                 <a:ea typeface="Arial"/>
@@ -1709,7 +1709,7 @@
             <a:r>
               <a:rPr b="0" lang="en-US" sz="1800" spc="-1" strike="noStrike">
                 <a:solidFill>
-                  <a:srgbClr val="1a1a2e"/>
+                  <a:srgbClr val="1b3a6b"/>
                 </a:solidFill>
                 <a:latin typeface="Arial"/>
                 <a:ea typeface="Arial"/>
@@ -1878,7 +1878,7 @@
             <a:r>
               <a:rPr b="0" lang="en-US" sz="1800" spc="-1" strike="noStrike">
                 <a:solidFill>
-                  <a:srgbClr val="1a1a2e"/>
+                  <a:srgbClr val="1b3a6b"/>
                 </a:solidFill>
                 <a:latin typeface="Arial"/>
                 <a:ea typeface="Arial"/>
@@ -2047,7 +2047,7 @@
             <a:r>
               <a:rPr b="0" lang="en-US" sz="1800" spc="-1" strike="noStrike">
                 <a:solidFill>
-                  <a:srgbClr val="1a1a2e"/>
+                  <a:srgbClr val="1b3a6b"/>
                 </a:solidFill>
                 <a:latin typeface="Arial"/>
                 <a:ea typeface="Arial"/>
@@ -2090,7 +2090,7 @@
             <a:r>
               <a:rPr b="0" lang="en-US" sz="1800" spc="-1" strike="noStrike">
                 <a:solidFill>
-                  <a:srgbClr val="1a1a2e"/>
+                  <a:srgbClr val="1b3a6b"/>
                 </a:solidFill>
                 <a:latin typeface="Arial"/>
                 <a:ea typeface="Arial"/>
@@ -2948,7 +2948,7 @@
             <a:r>
               <a:rPr b="1" lang="en-US" sz="1800" spc="-1" strike="noStrike">
                 <a:solidFill>
-                  <a:srgbClr val="1a1a2e"/>
+                  <a:srgbClr val="1b3a6b"/>
                 </a:solidFill>
                 <a:latin typeface="Arial"/>
                 <a:ea typeface="Arial"/>
@@ -3117,7 +3117,7 @@
             <a:r>
               <a:rPr b="0" lang="en-US" sz="1800" spc="-1" strike="noStrike">
                 <a:solidFill>
-                  <a:srgbClr val="1a1a2e"/>
+                  <a:srgbClr val="1b3a6b"/>
                 </a:solidFill>
                 <a:latin typeface="Arial"/>
                 <a:ea typeface="Arial"/>
@@ -3160,7 +3160,7 @@
             <a:r>
               <a:rPr b="0" lang="en-US" sz="1800" spc="-1" strike="noStrike">
                 <a:solidFill>
-                  <a:srgbClr val="1a1a2e"/>
+                  <a:srgbClr val="1b3a6b"/>
                 </a:solidFill>
                 <a:latin typeface="Arial"/>
                 <a:ea typeface="Arial"/>
@@ -3329,7 +3329,7 @@
             <a:r>
               <a:rPr b="1" lang="en-US" sz="1800" spc="-1" strike="noStrike">
                 <a:solidFill>
-                  <a:srgbClr val="1a1a2e"/>
+                  <a:srgbClr val="1b3a6b"/>
                 </a:solidFill>
                 <a:latin typeface="Arial"/>
                 <a:ea typeface="Arial"/>
@@ -3498,7 +3498,7 @@
             <a:r>
               <a:rPr b="0" lang="en-US" sz="1800" spc="-1" strike="noStrike">
                 <a:solidFill>
-                  <a:srgbClr val="1a1a2e"/>
+                  <a:srgbClr val="1b3a6b"/>
                 </a:solidFill>
                 <a:latin typeface="Arial"/>
                 <a:ea typeface="Arial"/>
@@ -3667,7 +3667,7 @@
             <a:r>
               <a:rPr b="0" lang="en-US" sz="1800" spc="-1" strike="noStrike">
                 <a:solidFill>
-                  <a:srgbClr val="1a1a2e"/>
+                  <a:srgbClr val="1b3a6b"/>
                 </a:solidFill>
                 <a:latin typeface="Arial"/>
                 <a:ea typeface="Arial"/>
@@ -3710,7 +3710,7 @@
             <a:r>
               <a:rPr b="0" lang="en-US" sz="1800" spc="-1" strike="noStrike">
                 <a:solidFill>
-                  <a:srgbClr val="1a1a2e"/>
+                  <a:srgbClr val="1b3a6b"/>
                 </a:solidFill>
                 <a:latin typeface="Arial"/>
                 <a:ea typeface="Arial"/>
@@ -3753,7 +3753,7 @@
             <a:r>
               <a:rPr b="0" lang="en-US" sz="1800" spc="-1" strike="noStrike">
                 <a:solidFill>
-                  <a:srgbClr val="1a1a2e"/>
+                  <a:srgbClr val="1b3a6b"/>
                 </a:solidFill>
                 <a:latin typeface="Arial"/>
                 <a:ea typeface="Arial"/>
@@ -5071,7 +5071,7 @@
             <a:r>
               <a:rPr b="0" lang="en-US" sz="1800" spc="-1" strike="noStrike">
                 <a:solidFill>
-                  <a:srgbClr val="1a1a2e"/>
+                  <a:srgbClr val="1b3a6b"/>
                 </a:solidFill>
                 <a:latin typeface="Arial"/>
                 <a:ea typeface="Arial"/>
@@ -5081,7 +5081,7 @@
             <a:r>
               <a:rPr b="1" lang="en-US" sz="1800" spc="-1" strike="noStrike">
                 <a:solidFill>
-                  <a:srgbClr val="1a1a2e"/>
+                  <a:srgbClr val="1b3a6b"/>
                 </a:solidFill>
                 <a:latin typeface="Arial"/>
                 <a:ea typeface="Arial"/>
@@ -5250,7 +5250,7 @@
             <a:r>
               <a:rPr b="0" lang="en-US" sz="1800" spc="-1" strike="noStrike">
                 <a:solidFill>
-                  <a:srgbClr val="1a1a2e"/>
+                  <a:srgbClr val="1b3a6b"/>
                 </a:solidFill>
                 <a:latin typeface="Arial"/>
                 <a:ea typeface="Arial"/>
@@ -5420,7 +5420,7 @@
             <a:r>
               <a:rPr b="0" lang="en-US" sz="1800" spc="-1" strike="noStrike">
                 <a:solidFill>
-                  <a:srgbClr val="1a1a2e"/>
+                  <a:srgbClr val="1b3a6b"/>
                 </a:solidFill>
                 <a:latin typeface="Arial"/>
                 <a:ea typeface="Arial"/>
@@ -5430,7 +5430,7 @@
             <a:r>
               <a:rPr b="1" lang="en-US" sz="1800" spc="-1" strike="noStrike">
                 <a:solidFill>
-                  <a:srgbClr val="1a1a2e"/>
+                  <a:srgbClr val="1b3a6b"/>
                 </a:solidFill>
                 <a:latin typeface="Arial"/>
                 <a:ea typeface="Arial"/>
@@ -5599,7 +5599,7 @@
             <a:r>
               <a:rPr b="0" lang="en-US" sz="1800" spc="-1" strike="noStrike">
                 <a:solidFill>
-                  <a:srgbClr val="1a1a2e"/>
+                  <a:srgbClr val="1b3a6b"/>
                 </a:solidFill>
                 <a:latin typeface="Arial"/>
                 <a:ea typeface="Arial"/>
@@ -5769,7 +5769,7 @@
             <a:r>
               <a:rPr b="1" lang="en-US" sz="1800" spc="-1" strike="noStrike">
                 <a:solidFill>
-                  <a:srgbClr val="1a1a2e"/>
+                  <a:srgbClr val="1b3a6b"/>
                 </a:solidFill>
                 <a:latin typeface="Arial"/>
                 <a:ea typeface="Arial"/>
@@ -5812,7 +5812,7 @@
             <a:r>
               <a:rPr b="0" lang="en-US" sz="1800" spc="-1" strike="noStrike">
                 <a:solidFill>
-                  <a:srgbClr val="1a1a2e"/>
+                  <a:srgbClr val="1b3a6b"/>
                 </a:solidFill>
                 <a:latin typeface="Arial"/>
                 <a:ea typeface="Arial"/>
@@ -6440,7 +6440,7 @@
             <a:r>
               <a:rPr b="0" lang="en-US" sz="1800" spc="-1" strike="noStrike">
                 <a:solidFill>
-                  <a:srgbClr val="1a1a2e"/>
+                  <a:srgbClr val="1b3a6b"/>
                 </a:solidFill>
                 <a:latin typeface="Arial"/>
                 <a:ea typeface="Arial"/>
@@ -6609,7 +6609,7 @@
             <a:r>
               <a:rPr b="0" lang="en-US" sz="1800" spc="-1" strike="noStrike">
                 <a:solidFill>
-                  <a:srgbClr val="1a1a2e"/>
+                  <a:srgbClr val="1b3a6b"/>
                 </a:solidFill>
                 <a:latin typeface="Arial"/>
                 <a:ea typeface="Arial"/>
@@ -6652,7 +6652,7 @@
             <a:r>
               <a:rPr b="0" lang="en-US" sz="1800" spc="-1" strike="noStrike">
                 <a:solidFill>
-                  <a:srgbClr val="1a1a2e"/>
+                  <a:srgbClr val="1b3a6b"/>
                 </a:solidFill>
                 <a:latin typeface="Arial"/>
                 <a:ea typeface="Arial"/>
@@ -6821,7 +6821,7 @@
             <a:r>
               <a:rPr b="1" lang="en-US" sz="1800" spc="-1" strike="noStrike">
                 <a:solidFill>
-                  <a:srgbClr val="1a1a2e"/>
+                  <a:srgbClr val="1b3a6b"/>
                 </a:solidFill>
                 <a:latin typeface="Arial"/>
                 <a:ea typeface="Arial"/>
@@ -6990,7 +6990,7 @@
             <a:r>
               <a:rPr b="0" lang="en-US" sz="1800" spc="-1" strike="noStrike">
                 <a:solidFill>
-                  <a:srgbClr val="1a1a2e"/>
+                  <a:srgbClr val="1b3a6b"/>
                 </a:solidFill>
                 <a:latin typeface="Arial"/>
                 <a:ea typeface="Arial"/>
@@ -7159,7 +7159,7 @@
             <a:r>
               <a:rPr b="0" lang="en-US" sz="1800" spc="-1" strike="noStrike">
                 <a:solidFill>
-                  <a:srgbClr val="1a1a2e"/>
+                  <a:srgbClr val="1b3a6b"/>
                 </a:solidFill>
                 <a:latin typeface="Arial"/>
                 <a:ea typeface="Arial"/>
@@ -7202,7 +7202,7 @@
             <a:r>
               <a:rPr b="0" lang="en-US" sz="1800" spc="-1" strike="noStrike">
                 <a:solidFill>
-                  <a:srgbClr val="1a1a2e"/>
+                  <a:srgbClr val="1b3a6b"/>
                 </a:solidFill>
                 <a:latin typeface="Arial"/>
                 <a:ea typeface="Arial"/>
@@ -7245,7 +7245,7 @@
             <a:r>
               <a:rPr b="0" i="1" lang="en-US" sz="1800" spc="-1" strike="noStrike">
                 <a:solidFill>
-                  <a:srgbClr val="1a1a2e"/>
+                  <a:srgbClr val="1b3a6b"/>
                 </a:solidFill>
                 <a:latin typeface="Arial"/>
                 <a:ea typeface="Arial"/>
@@ -7873,7 +7873,7 @@
             <a:r>
               <a:rPr b="0" lang="en-US" sz="1800" spc="-1" strike="noStrike">
                 <a:solidFill>
-                  <a:srgbClr val="1a1a2e"/>
+                  <a:srgbClr val="1b3a6b"/>
                 </a:solidFill>
                 <a:latin typeface="Arial"/>
                 <a:ea typeface="Arial"/>
@@ -8042,7 +8042,7 @@
             <a:r>
               <a:rPr b="0" lang="en-US" sz="1800" spc="-1" strike="noStrike">
                 <a:solidFill>
-                  <a:srgbClr val="1a1a2e"/>
+                  <a:srgbClr val="1b3a6b"/>
                 </a:solidFill>
                 <a:latin typeface="Arial"/>
                 <a:ea typeface="Arial"/>
@@ -8211,7 +8211,7 @@
             <a:r>
               <a:rPr b="0" lang="en-US" sz="1800" spc="-1" strike="noStrike">
                 <a:solidFill>
-                  <a:srgbClr val="1a1a2e"/>
+                  <a:srgbClr val="1b3a6b"/>
                 </a:solidFill>
                 <a:latin typeface="Arial"/>
                 <a:ea typeface="Arial"/>
@@ -8380,7 +8380,7 @@
             <a:r>
               <a:rPr b="0" lang="en-US" sz="1800" spc="-1" strike="noStrike">
                 <a:solidFill>
-                  <a:srgbClr val="1a1a2e"/>
+                  <a:srgbClr val="1b3a6b"/>
                 </a:solidFill>
                 <a:latin typeface="Arial"/>
                 <a:ea typeface="Arial"/>
@@ -8423,7 +8423,7 @@
             <a:r>
               <a:rPr b="1" lang="en-US" sz="1800" spc="-1" strike="noStrike">
                 <a:solidFill>
-                  <a:srgbClr val="1a1a2e"/>
+                  <a:srgbClr val="1b3a6b"/>
                 </a:solidFill>
                 <a:latin typeface="Arial"/>
                 <a:ea typeface="Arial"/>
@@ -8925,7 +8925,7 @@
             <a:r>
               <a:rPr b="1" lang="en-US" sz="1800" spc="-1" strike="noStrike">
                 <a:solidFill>
-                  <a:srgbClr val="1a1a2e"/>
+                  <a:srgbClr val="1b3a6b"/>
                 </a:solidFill>
                 <a:latin typeface="Arial"/>
                 <a:ea typeface="Arial"/>
@@ -9094,7 +9094,7 @@
             <a:r>
               <a:rPr b="0" lang="en-US" sz="1800" spc="-1" strike="noStrike">
                 <a:solidFill>
-                  <a:srgbClr val="1a1a2e"/>
+                  <a:srgbClr val="1b3a6b"/>
                 </a:solidFill>
                 <a:latin typeface="Arial"/>
                 <a:ea typeface="Arial"/>
@@ -9263,7 +9263,7 @@
             <a:r>
               <a:rPr b="0" lang="en-US" sz="1800" spc="-1" strike="noStrike">
                 <a:solidFill>
-                  <a:srgbClr val="1a1a2e"/>
+                  <a:srgbClr val="1b3a6b"/>
                 </a:solidFill>
                 <a:latin typeface="Arial"/>
                 <a:ea typeface="Arial"/>
@@ -9432,7 +9432,7 @@
             <a:r>
               <a:rPr b="0" lang="en-US" sz="1800" spc="-1" strike="noStrike">
                 <a:solidFill>
-                  <a:srgbClr val="1a1a2e"/>
+                  <a:srgbClr val="1b3a6b"/>
                 </a:solidFill>
                 <a:latin typeface="Arial"/>
                 <a:ea typeface="Arial"/>
@@ -9601,7 +9601,7 @@
             <a:r>
               <a:rPr b="0" lang="en-US" sz="1800" spc="-1" strike="noStrike">
                 <a:solidFill>
-                  <a:srgbClr val="1a1a2e"/>
+                  <a:srgbClr val="1b3a6b"/>
                 </a:solidFill>
                 <a:latin typeface="Arial"/>
                 <a:ea typeface="Arial"/>
@@ -9644,7 +9644,7 @@
             <a:r>
               <a:rPr b="0" lang="en-US" sz="1800" spc="-1" strike="noStrike">
                 <a:solidFill>
-                  <a:srgbClr val="1a1a2e"/>
+                  <a:srgbClr val="1b3a6b"/>
                 </a:solidFill>
                 <a:latin typeface="Arial"/>
                 <a:ea typeface="Arial"/>
@@ -9687,7 +9687,7 @@
             <a:r>
               <a:rPr b="0" i="1" lang="en-US" sz="1800" spc="-1" strike="noStrike">
                 <a:solidFill>
-                  <a:srgbClr val="1a1a2e"/>
+                  <a:srgbClr val="1b3a6b"/>
                 </a:solidFill>
                 <a:latin typeface="Arial"/>
                 <a:ea typeface="Arial"/>
@@ -14703,7 +14703,7 @@
             <a:r>
               <a:rPr b="1" lang="en-US" sz="1530" spc="-1" strike="noStrike">
                 <a:solidFill>
-                  <a:srgbClr val="1a1a2e"/>
+                  <a:srgbClr val="1b3a6b"/>
                 </a:solidFill>
                 <a:latin typeface="Arial"/>
                 <a:ea typeface="Arial"/>
@@ -14746,7 +14746,7 @@
             <a:r>
               <a:rPr b="1" lang="en-US" sz="1530" spc="-1" strike="noStrike">
                 <a:solidFill>
-                  <a:srgbClr val="1a1a2e"/>
+                  <a:srgbClr val="1b3a6b"/>
                 </a:solidFill>
                 <a:latin typeface="Arial"/>
                 <a:ea typeface="Arial"/>
@@ -14789,7 +14789,7 @@
             <a:r>
               <a:rPr b="1" lang="en-US" sz="1530" spc="-1" strike="noStrike">
                 <a:solidFill>
-                  <a:srgbClr val="1a1a2e"/>
+                  <a:srgbClr val="1b3a6b"/>
                 </a:solidFill>
                 <a:latin typeface="Arial"/>
                 <a:ea typeface="Arial"/>
@@ -14832,7 +14832,7 @@
             <a:r>
               <a:rPr b="1" lang="en-US" sz="1530" spc="-1" strike="noStrike">
                 <a:solidFill>
-                  <a:srgbClr val="1a1a2e"/>
+                  <a:srgbClr val="1b3a6b"/>
                 </a:solidFill>
                 <a:latin typeface="Arial"/>
                 <a:ea typeface="Arial"/>
@@ -14875,7 +14875,7 @@
             <a:r>
               <a:rPr b="0" lang="en-US" sz="1530" spc="-1" strike="noStrike">
                 <a:solidFill>
-                  <a:srgbClr val="1a1a2e"/>
+                  <a:srgbClr val="1b3a6b"/>
                 </a:solidFill>
                 <a:latin typeface="Arial"/>
                 <a:ea typeface="Arial"/>
@@ -14918,7 +14918,7 @@
             <a:r>
               <a:rPr b="0" lang="en-US" sz="1530" spc="-1" strike="noStrike">
                 <a:solidFill>
-                  <a:srgbClr val="1a1a2e"/>
+                  <a:srgbClr val="1b3a6b"/>
                 </a:solidFill>
                 <a:latin typeface="Arial"/>
                 <a:ea typeface="Arial"/>
@@ -14961,7 +14961,7 @@
             <a:r>
               <a:rPr b="0" lang="en-US" sz="1530" spc="-1" strike="noStrike">
                 <a:solidFill>
-                  <a:srgbClr val="1a1a2e"/>
+                  <a:srgbClr val="1b3a6b"/>
                 </a:solidFill>
                 <a:latin typeface="Arial"/>
                 <a:ea typeface="Arial"/>
@@ -15004,7 +15004,7 @@
             <a:r>
               <a:rPr b="0" lang="en-US" sz="1530" spc="-1" strike="noStrike">
                 <a:solidFill>
-                  <a:srgbClr val="1a1a2e"/>
+                  <a:srgbClr val="1b3a6b"/>
                 </a:solidFill>
                 <a:latin typeface="Arial"/>
                 <a:ea typeface="Arial"/>
@@ -15047,7 +15047,7 @@
             <a:r>
               <a:rPr b="0" lang="en-US" sz="1530" spc="-1" strike="noStrike">
                 <a:solidFill>
-                  <a:srgbClr val="1a1a2e"/>
+                  <a:srgbClr val="1b3a6b"/>
                 </a:solidFill>
                 <a:latin typeface="Arial"/>
                 <a:ea typeface="Arial"/>
@@ -15090,7 +15090,7 @@
             <a:r>
               <a:rPr b="0" lang="en-US" sz="1530" spc="-1" strike="noStrike">
                 <a:solidFill>
-                  <a:srgbClr val="1a1a2e"/>
+                  <a:srgbClr val="1b3a6b"/>
                 </a:solidFill>
                 <a:latin typeface="Arial"/>
                 <a:ea typeface="Arial"/>
@@ -15133,7 +15133,7 @@
             <a:r>
               <a:rPr b="0" lang="en-US" sz="1530" spc="-1" strike="noStrike">
                 <a:solidFill>
-                  <a:srgbClr val="1a1a2e"/>
+                  <a:srgbClr val="1b3a6b"/>
                 </a:solidFill>
                 <a:latin typeface="Arial"/>
                 <a:ea typeface="Arial"/>
@@ -15176,7 +15176,7 @@
             <a:r>
               <a:rPr b="0" lang="en-US" sz="1530" spc="-1" strike="noStrike">
                 <a:solidFill>
-                  <a:srgbClr val="1a1a2e"/>
+                  <a:srgbClr val="1b3a6b"/>
                 </a:solidFill>
                 <a:latin typeface="Arial"/>
                 <a:ea typeface="Arial"/>
@@ -15219,7 +15219,7 @@
             <a:r>
               <a:rPr b="0" lang="en-US" sz="1530" spc="-1" strike="noStrike">
                 <a:solidFill>
-                  <a:srgbClr val="1a1a2e"/>
+                  <a:srgbClr val="1b3a6b"/>
                 </a:solidFill>
                 <a:latin typeface="Arial"/>
                 <a:ea typeface="Arial"/>
@@ -15262,7 +15262,7 @@
             <a:r>
               <a:rPr b="0" lang="en-US" sz="1530" spc="-1" strike="noStrike">
                 <a:solidFill>
-                  <a:srgbClr val="1a1a2e"/>
+                  <a:srgbClr val="1b3a6b"/>
                 </a:solidFill>
                 <a:latin typeface="Arial"/>
                 <a:ea typeface="Arial"/>
@@ -15305,7 +15305,7 @@
             <a:r>
               <a:rPr b="0" lang="en-US" sz="1530" spc="-1" strike="noStrike">
                 <a:solidFill>
-                  <a:srgbClr val="1a1a2e"/>
+                  <a:srgbClr val="1b3a6b"/>
                 </a:solidFill>
                 <a:latin typeface="Arial"/>
                 <a:ea typeface="Arial"/>
@@ -15348,7 +15348,7 @@
             <a:r>
               <a:rPr b="0" lang="en-US" sz="1530" spc="-1" strike="noStrike">
                 <a:solidFill>
-                  <a:srgbClr val="1a1a2e"/>
+                  <a:srgbClr val="1b3a6b"/>
                 </a:solidFill>
                 <a:latin typeface="Arial"/>
                 <a:ea typeface="Arial"/>
@@ -15391,7 +15391,7 @@
             <a:r>
               <a:rPr b="0" lang="en-US" sz="1530" spc="-1" strike="noStrike">
                 <a:solidFill>
-                  <a:srgbClr val="1a1a2e"/>
+                  <a:srgbClr val="1b3a6b"/>
                 </a:solidFill>
                 <a:latin typeface="Arial"/>
                 <a:ea typeface="Arial"/>
@@ -15434,7 +15434,7 @@
             <a:r>
               <a:rPr b="0" lang="en-US" sz="1530" spc="-1" strike="noStrike">
                 <a:solidFill>
-                  <a:srgbClr val="1a1a2e"/>
+                  <a:srgbClr val="1b3a6b"/>
                 </a:solidFill>
                 <a:latin typeface="Arial"/>
                 <a:ea typeface="Arial"/>
@@ -15477,7 +15477,7 @@
             <a:r>
               <a:rPr b="0" lang="en-US" sz="1530" spc="-1" strike="noStrike">
                 <a:solidFill>
-                  <a:srgbClr val="1a1a2e"/>
+                  <a:srgbClr val="1b3a6b"/>
                 </a:solidFill>
                 <a:latin typeface="Arial"/>
                 <a:ea typeface="Arial"/>
@@ -15520,7 +15520,7 @@
             <a:r>
               <a:rPr b="0" lang="en-US" sz="1530" spc="-1" strike="noStrike">
                 <a:solidFill>
-                  <a:srgbClr val="1a1a2e"/>
+                  <a:srgbClr val="1b3a6b"/>
                 </a:solidFill>
                 <a:latin typeface="Arial"/>
                 <a:ea typeface="Arial"/>
@@ -15563,7 +15563,7 @@
             <a:r>
               <a:rPr b="0" lang="en-US" sz="1530" spc="-1" strike="noStrike">
                 <a:solidFill>
-                  <a:srgbClr val="1a1a2e"/>
+                  <a:srgbClr val="1b3a6b"/>
                 </a:solidFill>
                 <a:latin typeface="Arial"/>
                 <a:ea typeface="Arial"/>
@@ -15606,7 +15606,7 @@
             <a:r>
               <a:rPr b="0" lang="en-US" sz="1530" spc="-1" strike="noStrike">
                 <a:solidFill>
-                  <a:srgbClr val="1a1a2e"/>
+                  <a:srgbClr val="1b3a6b"/>
                 </a:solidFill>
                 <a:latin typeface="Arial"/>
                 <a:ea typeface="Arial"/>
@@ -15649,7 +15649,7 @@
             <a:r>
               <a:rPr b="0" lang="en-US" sz="1530" spc="-1" strike="noStrike">
                 <a:solidFill>
-                  <a:srgbClr val="1a1a2e"/>
+                  <a:srgbClr val="1b3a6b"/>
                 </a:solidFill>
                 <a:latin typeface="Arial"/>
                 <a:ea typeface="Arial"/>
@@ -15692,7 +15692,7 @@
             <a:r>
               <a:rPr b="0" lang="en-US" sz="1530" spc="-1" strike="noStrike">
                 <a:solidFill>
-                  <a:srgbClr val="1a1a2e"/>
+                  <a:srgbClr val="1b3a6b"/>
                 </a:solidFill>
                 <a:latin typeface="Arial"/>
                 <a:ea typeface="Arial"/>
@@ -15735,7 +15735,7 @@
             <a:r>
               <a:rPr b="0" lang="en-US" sz="1530" spc="-1" strike="noStrike">
                 <a:solidFill>
-                  <a:srgbClr val="1a1a2e"/>
+                  <a:srgbClr val="1b3a6b"/>
                 </a:solidFill>
                 <a:latin typeface="Arial"/>
                 <a:ea typeface="Arial"/>
@@ -15778,7 +15778,7 @@
             <a:r>
               <a:rPr b="0" lang="en-US" sz="1530" spc="-1" strike="noStrike">
                 <a:solidFill>
-                  <a:srgbClr val="1a1a2e"/>
+                  <a:srgbClr val="1b3a6b"/>
                 </a:solidFill>
                 <a:latin typeface="Arial"/>
                 <a:ea typeface="Arial"/>
@@ -15821,7 +15821,7 @@
             <a:r>
               <a:rPr b="0" lang="en-US" sz="1530" spc="-1" strike="noStrike">
                 <a:solidFill>
-                  <a:srgbClr val="1a1a2e"/>
+                  <a:srgbClr val="1b3a6b"/>
                 </a:solidFill>
                 <a:latin typeface="Arial"/>
                 <a:ea typeface="Arial"/>
@@ -15864,7 +15864,7 @@
             <a:r>
               <a:rPr b="0" lang="en-US" sz="1530" spc="-1" strike="noStrike">
                 <a:solidFill>
-                  <a:srgbClr val="1a1a2e"/>
+                  <a:srgbClr val="1b3a6b"/>
                 </a:solidFill>
                 <a:latin typeface="Arial"/>
                 <a:ea typeface="Arial"/>
@@ -15907,7 +15907,7 @@
             <a:r>
               <a:rPr b="0" lang="en-US" sz="1530" spc="-1" strike="noStrike">
                 <a:solidFill>
-                  <a:srgbClr val="1a1a2e"/>
+                  <a:srgbClr val="1b3a6b"/>
                 </a:solidFill>
                 <a:latin typeface="Arial"/>
                 <a:ea typeface="Arial"/>
@@ -15950,7 +15950,7 @@
             <a:r>
               <a:rPr b="0" lang="en-US" sz="1530" spc="-1" strike="noStrike">
                 <a:solidFill>
-                  <a:srgbClr val="1a1a2e"/>
+                  <a:srgbClr val="1b3a6b"/>
                 </a:solidFill>
                 <a:latin typeface="Arial"/>
                 <a:ea typeface="Arial"/>
@@ -15993,7 +15993,7 @@
             <a:r>
               <a:rPr b="0" lang="en-US" sz="1530" spc="-1" strike="noStrike">
                 <a:solidFill>
-                  <a:srgbClr val="1a1a2e"/>
+                  <a:srgbClr val="1b3a6b"/>
                 </a:solidFill>
                 <a:latin typeface="Arial"/>
                 <a:ea typeface="Arial"/>
@@ -16036,7 +16036,7 @@
             <a:r>
               <a:rPr b="0" lang="en-US" sz="1530" spc="-1" strike="noStrike">
                 <a:solidFill>
-                  <a:srgbClr val="1a1a2e"/>
+                  <a:srgbClr val="1b3a6b"/>
                 </a:solidFill>
                 <a:latin typeface="Arial"/>
                 <a:ea typeface="Arial"/>
@@ -16664,7 +16664,7 @@
             <a:r>
               <a:rPr b="0" lang="en-US" sz="1800" spc="-1" strike="noStrike">
                 <a:solidFill>
-                  <a:srgbClr val="1a1a2e"/>
+                  <a:srgbClr val="1b3a6b"/>
                 </a:solidFill>
                 <a:latin typeface="Arial"/>
                 <a:ea typeface="Arial"/>
@@ -16833,7 +16833,7 @@
             <a:r>
               <a:rPr b="0" lang="en-US" sz="1800" spc="-1" strike="noStrike">
                 <a:solidFill>
-                  <a:srgbClr val="1a1a2e"/>
+                  <a:srgbClr val="1b3a6b"/>
                 </a:solidFill>
                 <a:latin typeface="Arial"/>
                 <a:ea typeface="Arial"/>
@@ -17002,7 +17002,7 @@
             <a:r>
               <a:rPr b="0" lang="en-US" sz="1800" spc="-1" strike="noStrike">
                 <a:solidFill>
-                  <a:srgbClr val="1a1a2e"/>
+                  <a:srgbClr val="1b3a6b"/>
                 </a:solidFill>
                 <a:latin typeface="Arial"/>
                 <a:ea typeface="Arial"/>
@@ -17171,7 +17171,7 @@
             <a:r>
               <a:rPr b="0" lang="en-US" sz="1800" spc="-1" strike="noStrike">
                 <a:solidFill>
-                  <a:srgbClr val="1a1a2e"/>
+                  <a:srgbClr val="1b3a6b"/>
                 </a:solidFill>
                 <a:latin typeface="Arial"/>
                 <a:ea typeface="Arial"/>
@@ -17214,7 +17214,7 @@
             <a:r>
               <a:rPr b="0" lang="en-US" sz="1800" spc="-1" strike="noStrike">
                 <a:solidFill>
-                  <a:srgbClr val="1a1a2e"/>
+                  <a:srgbClr val="1b3a6b"/>
                 </a:solidFill>
                 <a:latin typeface="Arial"/>
                 <a:ea typeface="Arial"/>
@@ -17590,7 +17590,7 @@
             <a:r>
               <a:rPr b="0" lang="en-US" sz="1800" spc="-1" strike="noStrike">
                 <a:solidFill>
-                  <a:srgbClr val="1a1a2e"/>
+                  <a:srgbClr val="1b3a6b"/>
                 </a:solidFill>
                 <a:latin typeface="Arial"/>
                 <a:ea typeface="Arial"/>
@@ -17600,7 +17600,7 @@
             <a:r>
               <a:rPr b="1" lang="en-US" sz="1800" spc="-1" strike="noStrike">
                 <a:solidFill>
-                  <a:srgbClr val="1a1a2e"/>
+                  <a:srgbClr val="1b3a6b"/>
                 </a:solidFill>
                 <a:latin typeface="Arial"/>
                 <a:ea typeface="Arial"/>
@@ -17610,7 +17610,7 @@
             <a:r>
               <a:rPr b="0" lang="en-US" sz="1800" spc="-1" strike="noStrike">
                 <a:solidFill>
-                  <a:srgbClr val="1a1a2e"/>
+                  <a:srgbClr val="1b3a6b"/>
                 </a:solidFill>
                 <a:latin typeface="Arial"/>
                 <a:ea typeface="Arial"/>
@@ -17779,7 +17779,7 @@
             <a:r>
               <a:rPr b="1" lang="en-US" sz="1800" spc="-1" strike="noStrike">
                 <a:solidFill>
-                  <a:srgbClr val="1a1a2e"/>
+                  <a:srgbClr val="1b3a6b"/>
                 </a:solidFill>
                 <a:latin typeface="Arial"/>
                 <a:ea typeface="Arial"/>
@@ -17948,7 +17948,7 @@
             <a:r>
               <a:rPr b="1" lang="en-US" sz="1800" spc="-1" strike="noStrike">
                 <a:solidFill>
-                  <a:srgbClr val="1a1a2e"/>
+                  <a:srgbClr val="1b3a6b"/>
                 </a:solidFill>
                 <a:latin typeface="Arial"/>
                 <a:ea typeface="Arial"/>
@@ -17958,7 +17958,7 @@
             <a:r>
               <a:rPr b="0" lang="en-US" sz="1800" spc="-1" strike="noStrike">
                 <a:solidFill>
-                  <a:srgbClr val="1a1a2e"/>
+                  <a:srgbClr val="1b3a6b"/>
                 </a:solidFill>
                 <a:latin typeface="Arial"/>
                 <a:ea typeface="Arial"/>
@@ -18127,7 +18127,7 @@
             <a:r>
               <a:rPr b="1" lang="en-US" sz="1800" spc="-1" strike="noStrike">
                 <a:solidFill>
-                  <a:srgbClr val="1a1a2e"/>
+                  <a:srgbClr val="1b3a6b"/>
                 </a:solidFill>
                 <a:latin typeface="Arial"/>
                 <a:ea typeface="Arial"/>
@@ -18137,7 +18137,7 @@
             <a:r>
               <a:rPr b="0" lang="en-US" sz="1800" spc="-1" strike="noStrike">
                 <a:solidFill>
-                  <a:srgbClr val="1a1a2e"/>
+                  <a:srgbClr val="1b3a6b"/>
                 </a:solidFill>
                 <a:latin typeface="Arial"/>
                 <a:ea typeface="Arial"/>
@@ -18306,7 +18306,7 @@
             <a:r>
               <a:rPr b="1" lang="en-US" sz="1800" spc="-1" strike="noStrike">
                 <a:solidFill>
-                  <a:srgbClr val="1a1a2e"/>
+                  <a:srgbClr val="1b3a6b"/>
                 </a:solidFill>
                 <a:latin typeface="Arial"/>
                 <a:ea typeface="Arial"/>
@@ -18316,7 +18316,7 @@
             <a:r>
               <a:rPr b="0" lang="en-US" sz="1800" spc="-1" strike="noStrike">
                 <a:solidFill>
-                  <a:srgbClr val="1a1a2e"/>
+                  <a:srgbClr val="1b3a6b"/>
                 </a:solidFill>
                 <a:latin typeface="Arial"/>
                 <a:ea typeface="Arial"/>
@@ -18359,7 +18359,7 @@
             <a:r>
               <a:rPr b="1" lang="en-US" sz="1800" spc="-1" strike="noStrike">
                 <a:solidFill>
-                  <a:srgbClr val="1a1a2e"/>
+                  <a:srgbClr val="1b3a6b"/>
                 </a:solidFill>
                 <a:latin typeface="Arial"/>
                 <a:ea typeface="Arial"/>
@@ -18369,7 +18369,7 @@
             <a:r>
               <a:rPr b="0" lang="en-US" sz="1800" spc="-1" strike="noStrike">
                 <a:solidFill>
-                  <a:srgbClr val="1a1a2e"/>
+                  <a:srgbClr val="1b3a6b"/>
                 </a:solidFill>
                 <a:latin typeface="Arial"/>
                 <a:ea typeface="Arial"/>
@@ -18412,7 +18412,7 @@
             <a:r>
               <a:rPr b="0" i="1" lang="en-US" sz="1800" spc="-1" strike="noStrike">
                 <a:solidFill>
-                  <a:srgbClr val="1a1a2e"/>
+                  <a:srgbClr val="1b3a6b"/>
                 </a:solidFill>
                 <a:latin typeface="Arial"/>
                 <a:ea typeface="Arial"/>
@@ -22029,7 +22029,7 @@
             <a:r>
               <a:rPr b="1" lang="en-US" sz="1530" spc="-1" strike="noStrike">
                 <a:solidFill>
-                  <a:srgbClr val="1a1a2e"/>
+                  <a:srgbClr val="1b3a6b"/>
                 </a:solidFill>
                 <a:latin typeface="Arial"/>
                 <a:ea typeface="Arial"/>
@@ -22072,7 +22072,7 @@
             <a:r>
               <a:rPr b="1" lang="en-US" sz="1530" spc="-1" strike="noStrike">
                 <a:solidFill>
-                  <a:srgbClr val="1a1a2e"/>
+                  <a:srgbClr val="1b3a6b"/>
                 </a:solidFill>
                 <a:latin typeface="Arial"/>
                 <a:ea typeface="Arial"/>
@@ -22115,7 +22115,7 @@
             <a:r>
               <a:rPr b="1" lang="en-US" sz="1530" spc="-1" strike="noStrike">
                 <a:solidFill>
-                  <a:srgbClr val="1a1a2e"/>
+                  <a:srgbClr val="1b3a6b"/>
                 </a:solidFill>
                 <a:latin typeface="Arial"/>
                 <a:ea typeface="Arial"/>
@@ -22158,7 +22158,7 @@
             <a:r>
               <a:rPr b="1" lang="en-US" sz="1530" spc="-1" strike="noStrike">
                 <a:solidFill>
-                  <a:srgbClr val="1a1a2e"/>
+                  <a:srgbClr val="1b3a6b"/>
                 </a:solidFill>
                 <a:latin typeface="Arial"/>
                 <a:ea typeface="Arial"/>
@@ -22201,7 +22201,7 @@
             <a:r>
               <a:rPr b="0" lang="en-US" sz="1530" spc="-1" strike="noStrike">
                 <a:solidFill>
-                  <a:srgbClr val="1a1a2e"/>
+                  <a:srgbClr val="1b3a6b"/>
                 </a:solidFill>
                 <a:latin typeface="Arial"/>
                 <a:ea typeface="Arial"/>
@@ -22244,7 +22244,7 @@
             <a:r>
               <a:rPr b="0" lang="en-US" sz="1530" spc="-1" strike="noStrike">
                 <a:solidFill>
-                  <a:srgbClr val="1a1a2e"/>
+                  <a:srgbClr val="1b3a6b"/>
                 </a:solidFill>
                 <a:latin typeface="Arial"/>
                 <a:ea typeface="Arial"/>
@@ -22287,7 +22287,7 @@
             <a:r>
               <a:rPr b="0" lang="en-US" sz="1530" spc="-1" strike="noStrike">
                 <a:solidFill>
-                  <a:srgbClr val="1a1a2e"/>
+                  <a:srgbClr val="1b3a6b"/>
                 </a:solidFill>
                 <a:latin typeface="Arial"/>
                 <a:ea typeface="Arial"/>
@@ -22330,7 +22330,7 @@
             <a:r>
               <a:rPr b="0" lang="en-US" sz="1530" spc="-1" strike="noStrike">
                 <a:solidFill>
-                  <a:srgbClr val="1a1a2e"/>
+                  <a:srgbClr val="1b3a6b"/>
                 </a:solidFill>
                 <a:latin typeface="Arial"/>
                 <a:ea typeface="Arial"/>
@@ -22373,7 +22373,7 @@
             <a:r>
               <a:rPr b="0" lang="en-US" sz="1530" spc="-1" strike="noStrike">
                 <a:solidFill>
-                  <a:srgbClr val="1a1a2e"/>
+                  <a:srgbClr val="1b3a6b"/>
                 </a:solidFill>
                 <a:latin typeface="Arial"/>
                 <a:ea typeface="Arial"/>
@@ -22416,7 +22416,7 @@
             <a:r>
               <a:rPr b="0" lang="en-US" sz="1530" spc="-1" strike="noStrike">
                 <a:solidFill>
-                  <a:srgbClr val="1a1a2e"/>
+                  <a:srgbClr val="1b3a6b"/>
                 </a:solidFill>
                 <a:latin typeface="Arial"/>
                 <a:ea typeface="Arial"/>
@@ -22459,7 +22459,7 @@
             <a:r>
               <a:rPr b="0" lang="en-US" sz="1530" spc="-1" strike="noStrike">
                 <a:solidFill>
-                  <a:srgbClr val="1a1a2e"/>
+                  <a:srgbClr val="1b3a6b"/>
                 </a:solidFill>
                 <a:latin typeface="Arial"/>
                 <a:ea typeface="Arial"/>
@@ -22502,7 +22502,7 @@
             <a:r>
               <a:rPr b="0" lang="en-US" sz="1530" spc="-1" strike="noStrike">
                 <a:solidFill>
-                  <a:srgbClr val="1a1a2e"/>
+                  <a:srgbClr val="1b3a6b"/>
                 </a:solidFill>
                 <a:latin typeface="Arial"/>
                 <a:ea typeface="Arial"/>
@@ -22545,7 +22545,7 @@
             <a:r>
               <a:rPr b="0" lang="en-US" sz="1530" spc="-1" strike="noStrike">
                 <a:solidFill>
-                  <a:srgbClr val="1a1a2e"/>
+                  <a:srgbClr val="1b3a6b"/>
                 </a:solidFill>
                 <a:latin typeface="Arial"/>
                 <a:ea typeface="Arial"/>
@@ -22588,7 +22588,7 @@
             <a:r>
               <a:rPr b="0" lang="en-US" sz="1530" spc="-1" strike="noStrike">
                 <a:solidFill>
-                  <a:srgbClr val="1a1a2e"/>
+                  <a:srgbClr val="1b3a6b"/>
                 </a:solidFill>
                 <a:latin typeface="Arial"/>
                 <a:ea typeface="Arial"/>
@@ -22631,7 +22631,7 @@
             <a:r>
               <a:rPr b="0" lang="en-US" sz="1530" spc="-1" strike="noStrike">
                 <a:solidFill>
-                  <a:srgbClr val="1a1a2e"/>
+                  <a:srgbClr val="1b3a6b"/>
                 </a:solidFill>
                 <a:latin typeface="Arial"/>
                 <a:ea typeface="Arial"/>
@@ -22674,7 +22674,7 @@
             <a:r>
               <a:rPr b="0" lang="en-US" sz="1530" spc="-1" strike="noStrike">
                 <a:solidFill>
-                  <a:srgbClr val="1a1a2e"/>
+                  <a:srgbClr val="1b3a6b"/>
                 </a:solidFill>
                 <a:latin typeface="Arial"/>
                 <a:ea typeface="Arial"/>
@@ -23578,7 +23578,7 @@
             <a:r>
               <a:rPr b="0" lang="en-US" sz="1530" spc="-1" strike="noStrike">
                 <a:solidFill>
-                  <a:srgbClr val="1a1a2e"/>
+                  <a:srgbClr val="1b3a6b"/>
                 </a:solidFill>
                 <a:latin typeface="DejaVuSansMono"/>
                 <a:ea typeface="DejaVuSansMono"/>
@@ -23621,7 +23621,7 @@
             <a:r>
               <a:rPr b="0" lang="en-US" sz="1530" spc="-1" strike="noStrike">
                 <a:solidFill>
-                  <a:srgbClr val="1a1a2e"/>
+                  <a:srgbClr val="1b3a6b"/>
                 </a:solidFill>
                 <a:latin typeface="DejaVuSansMono"/>
                 <a:ea typeface="DejaVuSansMono"/>
@@ -24353,7 +24353,7 @@
             <a:r>
               <a:rPr b="0" lang="en-US" sz="1800" spc="-1" strike="noStrike">
                 <a:solidFill>
-                  <a:srgbClr val="1a1a2e"/>
+                  <a:srgbClr val="1b3a6b"/>
                 </a:solidFill>
                 <a:latin typeface="Arial"/>
                 <a:ea typeface="Arial"/>
@@ -24522,7 +24522,7 @@
             <a:r>
               <a:rPr b="1" lang="en-US" sz="1800" spc="-1" strike="noStrike">
                 <a:solidFill>
-                  <a:srgbClr val="1a1a2e"/>
+                  <a:srgbClr val="1b3a6b"/>
                 </a:solidFill>
                 <a:latin typeface="Arial"/>
                 <a:ea typeface="Arial"/>
@@ -24691,7 +24691,7 @@
             <a:r>
               <a:rPr b="0" lang="en-US" sz="1800" spc="-1" strike="noStrike">
                 <a:solidFill>
-                  <a:srgbClr val="1a1a2e"/>
+                  <a:srgbClr val="1b3a6b"/>
                 </a:solidFill>
                 <a:latin typeface="Arial"/>
                 <a:ea typeface="Arial"/>
@@ -24734,7 +24734,7 @@
             <a:r>
               <a:rPr b="0" lang="en-US" sz="1800" spc="-1" strike="noStrike">
                 <a:solidFill>
-                  <a:srgbClr val="1a1a2e"/>
+                  <a:srgbClr val="1b3a6b"/>
                 </a:solidFill>
                 <a:latin typeface="Arial"/>
                 <a:ea typeface="Arial"/>
@@ -25110,7 +25110,7 @@
             <a:r>
               <a:rPr b="1" lang="en-US" sz="1800" spc="-1" strike="noStrike">
                 <a:solidFill>
-                  <a:srgbClr val="1a1a2e"/>
+                  <a:srgbClr val="1b3a6b"/>
                 </a:solidFill>
                 <a:latin typeface="Arial"/>
                 <a:ea typeface="Arial"/>
@@ -25120,7 +25120,7 @@
             <a:r>
               <a:rPr b="0" lang="en-US" sz="1800" spc="-1" strike="noStrike">
                 <a:solidFill>
-                  <a:srgbClr val="1a1a2e"/>
+                  <a:srgbClr val="1b3a6b"/>
                 </a:solidFill>
                 <a:latin typeface="Arial"/>
                 <a:ea typeface="Arial"/>
@@ -25163,7 +25163,7 @@
             <a:r>
               <a:rPr b="0" lang="en-US" sz="1800" spc="-1" strike="noStrike">
                 <a:solidFill>
-                  <a:srgbClr val="1a1a2e"/>
+                  <a:srgbClr val="1b3a6b"/>
                 </a:solidFill>
                 <a:latin typeface="Arial"/>
                 <a:ea typeface="Arial"/>
@@ -25206,7 +25206,7 @@
             <a:r>
               <a:rPr b="0" lang="en-US" sz="1800" spc="-1" strike="noStrike">
                 <a:solidFill>
-                  <a:srgbClr val="1a1a2e"/>
+                  <a:srgbClr val="1b3a6b"/>
                 </a:solidFill>
                 <a:latin typeface="Arial"/>
                 <a:ea typeface="Arial"/>
@@ -25249,7 +25249,7 @@
             <a:r>
               <a:rPr b="0" lang="en-US" sz="1800" spc="-1" strike="noStrike">
                 <a:solidFill>
-                  <a:srgbClr val="1a1a2e"/>
+                  <a:srgbClr val="1b3a6b"/>
                 </a:solidFill>
                 <a:latin typeface="Arial"/>
                 <a:ea typeface="Arial"/>
@@ -25292,7 +25292,7 @@
             <a:r>
               <a:rPr b="0" lang="en-US" sz="1800" spc="-1" strike="noStrike">
                 <a:solidFill>
-                  <a:srgbClr val="1a1a2e"/>
+                  <a:srgbClr val="1b3a6b"/>
                 </a:solidFill>
                 <a:latin typeface="Arial"/>
                 <a:ea typeface="Arial"/>
@@ -26024,7 +26024,7 @@
             <a:r>
               <a:rPr b="0" i="1" lang="en-US" sz="1800" spc="-1" strike="noStrike">
                 <a:solidFill>
-                  <a:srgbClr val="1a1a2e"/>
+                  <a:srgbClr val="1b3a6b"/>
                 </a:solidFill>
                 <a:latin typeface="Arial"/>
                 <a:ea typeface="Arial"/>
@@ -26423,7 +26423,7 @@
             <a:r>
               <a:rPr b="1" lang="en-US" sz="1800" spc="-1" strike="noStrike">
                 <a:solidFill>
-                  <a:srgbClr val="1a1a2e"/>
+                  <a:srgbClr val="1b3a6b"/>
                 </a:solidFill>
                 <a:latin typeface="Arial"/>
                 <a:ea typeface="Arial"/>
@@ -26433,7 +26433,7 @@
             <a:r>
               <a:rPr b="0" lang="en-US" sz="1800" spc="-1" strike="noStrike">
                 <a:solidFill>
-                  <a:srgbClr val="1a1a2e"/>
+                  <a:srgbClr val="1b3a6b"/>
                 </a:solidFill>
                 <a:latin typeface="Arial"/>
                 <a:ea typeface="Arial"/>
@@ -26935,7 +26935,7 @@
             <a:r>
               <a:rPr b="1" lang="en-US" sz="1800" spc="-1" strike="noStrike">
                 <a:solidFill>
-                  <a:srgbClr val="1a1a2e"/>
+                  <a:srgbClr val="1b3a6b"/>
                 </a:solidFill>
                 <a:latin typeface="Arial"/>
                 <a:ea typeface="Arial"/>
@@ -27104,7 +27104,7 @@
             <a:r>
               <a:rPr b="0" lang="en-US" sz="1800" spc="-1" strike="noStrike">
                 <a:solidFill>
-                  <a:srgbClr val="1a1a2e"/>
+                  <a:srgbClr val="1b3a6b"/>
                 </a:solidFill>
                 <a:latin typeface="Arial"/>
                 <a:ea typeface="Arial"/>
@@ -27273,7 +27273,7 @@
             <a:r>
               <a:rPr b="0" lang="en-US" sz="1800" spc="-1" strike="noStrike">
                 <a:solidFill>
-                  <a:srgbClr val="1a1a2e"/>
+                  <a:srgbClr val="1b3a6b"/>
                 </a:solidFill>
                 <a:latin typeface="Arial"/>
                 <a:ea typeface="Arial"/>
@@ -27316,7 +27316,7 @@
             <a:r>
               <a:rPr b="0" lang="en-US" sz="1800" spc="-1" strike="noStrike">
                 <a:solidFill>
-                  <a:srgbClr val="1a1a2e"/>
+                  <a:srgbClr val="1b3a6b"/>
                 </a:solidFill>
                 <a:latin typeface="Arial"/>
                 <a:ea typeface="Arial"/>
@@ -27485,7 +27485,7 @@
             <a:r>
               <a:rPr b="1" lang="en-US" sz="1800" spc="-1" strike="noStrike">
                 <a:solidFill>
-                  <a:srgbClr val="1a1a2e"/>
+                  <a:srgbClr val="1b3a6b"/>
                 </a:solidFill>
                 <a:latin typeface="Arial"/>
                 <a:ea typeface="Arial"/>
@@ -27654,7 +27654,7 @@
             <a:r>
               <a:rPr b="0" lang="en-US" sz="1800" spc="-1" strike="noStrike">
                 <a:solidFill>
-                  <a:srgbClr val="1a1a2e"/>
+                  <a:srgbClr val="1b3a6b"/>
                 </a:solidFill>
                 <a:latin typeface="Arial"/>
                 <a:ea typeface="Arial"/>
@@ -27823,7 +27823,7 @@
             <a:r>
               <a:rPr b="0" lang="en-US" sz="1800" spc="-1" strike="noStrike">
                 <a:solidFill>
-                  <a:srgbClr val="1a1a2e"/>
+                  <a:srgbClr val="1b3a6b"/>
                 </a:solidFill>
                 <a:latin typeface="Arial"/>
                 <a:ea typeface="Arial"/>
@@ -27866,7 +27866,7 @@
             <a:r>
               <a:rPr b="0" lang="en-US" sz="1800" spc="-1" strike="noStrike">
                 <a:solidFill>
-                  <a:srgbClr val="1a1a2e"/>
+                  <a:srgbClr val="1b3a6b"/>
                 </a:solidFill>
                 <a:latin typeface="Arial"/>
                 <a:ea typeface="Arial"/>
